--- a/documents/Key Screenshots.pptx
+++ b/documents/Key Screenshots.pptx
@@ -114,6 +114,11 @@
       </a:defRPr>
     </a:lvl9pPr>
   </p:defaultTextStyle>
+  <p:extLst>
+    <p:ext uri="{EFAFB233-063F-42B5-8137-9DF3F51BA10A}">
+      <p15:sldGuideLst xmlns:p15="http://schemas.microsoft.com/office/powerpoint/2012/main"/>
+    </p:ext>
+  </p:extLst>
 </p:presentation>
 </file>
 
@@ -122,7 +127,7 @@
   <pc:docChgLst>
     <pc:chgData name="Vaughn Staples" userId="9a5933822faaa4bf" providerId="LiveId" clId="{BB914C8C-BCA1-484B-9A1F-EBF33ADB071F}"/>
     <pc:docChg chg="modSld">
-      <pc:chgData name="Vaughn Staples" userId="9a5933822faaa4bf" providerId="LiveId" clId="{BB914C8C-BCA1-484B-9A1F-EBF33ADB071F}" dt="2026-03-24T08:29:33.148" v="1" actId="14100"/>
+      <pc:chgData name="Vaughn Staples" userId="9a5933822faaa4bf" providerId="LiveId" clId="{BB914C8C-BCA1-484B-9A1F-EBF33ADB071F}" dt="2026-03-24T12:26:29.019" v="2" actId="1076"/>
       <pc:docMkLst>
         <pc:docMk/>
       </pc:docMkLst>
@@ -138,6 +143,21 @@
             <pc:docMk/>
             <pc:sldMk cId="2488584234" sldId="256"/>
             <ac:picMk id="15" creationId="{15CF23CF-B192-018A-2EF7-EEDF6E3A9CC5}"/>
+          </ac:picMkLst>
+        </pc:picChg>
+      </pc:sldChg>
+      <pc:sldChg chg="modSp mod">
+        <pc:chgData name="Vaughn Staples" userId="9a5933822faaa4bf" providerId="LiveId" clId="{BB914C8C-BCA1-484B-9A1F-EBF33ADB071F}" dt="2026-03-24T12:26:29.019" v="2" actId="1076"/>
+        <pc:sldMkLst>
+          <pc:docMk/>
+          <pc:sldMk cId="3126189164" sldId="258"/>
+        </pc:sldMkLst>
+        <pc:picChg chg="mod">
+          <ac:chgData name="Vaughn Staples" userId="9a5933822faaa4bf" providerId="LiveId" clId="{BB914C8C-BCA1-484B-9A1F-EBF33ADB071F}" dt="2026-03-24T12:26:29.019" v="2" actId="1076"/>
+          <ac:picMkLst>
+            <pc:docMk/>
+            <pc:sldMk cId="3126189164" sldId="258"/>
+            <ac:picMk id="6" creationId="{903B0006-8E1B-2AAA-0C9B-75FE3B12C8B6}"/>
           </ac:picMkLst>
         </pc:picChg>
       </pc:sldChg>
@@ -3514,7 +3534,7 @@
         </p:blipFill>
         <p:spPr>
           <a:xfrm>
-            <a:off x="972312" y="0"/>
+            <a:off x="2698242" y="-68580"/>
             <a:ext cx="10247376" cy="6858000"/>
           </a:xfrm>
           <a:prstGeom prst="rect">

--- a/documents/Key Screenshots.pptx
+++ b/documents/Key Screenshots.pptx
@@ -127,7 +127,7 @@
   <pc:docChgLst>
     <pc:chgData name="Vaughn Staples" userId="9a5933822faaa4bf" providerId="LiveId" clId="{BB914C8C-BCA1-484B-9A1F-EBF33ADB071F}"/>
     <pc:docChg chg="modSld">
-      <pc:chgData name="Vaughn Staples" userId="9a5933822faaa4bf" providerId="LiveId" clId="{BB914C8C-BCA1-484B-9A1F-EBF33ADB071F}" dt="2026-03-24T12:26:29.019" v="2" actId="1076"/>
+      <pc:chgData name="Vaughn Staples" userId="9a5933822faaa4bf" providerId="LiveId" clId="{BB914C8C-BCA1-484B-9A1F-EBF33ADB071F}" dt="2026-03-24T12:34:56.834" v="8" actId="1076"/>
       <pc:docMkLst>
         <pc:docMk/>
       </pc:docMkLst>
@@ -147,13 +147,13 @@
         </pc:picChg>
       </pc:sldChg>
       <pc:sldChg chg="modSp mod">
-        <pc:chgData name="Vaughn Staples" userId="9a5933822faaa4bf" providerId="LiveId" clId="{BB914C8C-BCA1-484B-9A1F-EBF33ADB071F}" dt="2026-03-24T12:26:29.019" v="2" actId="1076"/>
+        <pc:chgData name="Vaughn Staples" userId="9a5933822faaa4bf" providerId="LiveId" clId="{BB914C8C-BCA1-484B-9A1F-EBF33ADB071F}" dt="2026-03-24T12:34:56.834" v="8" actId="1076"/>
         <pc:sldMkLst>
           <pc:docMk/>
           <pc:sldMk cId="3126189164" sldId="258"/>
         </pc:sldMkLst>
         <pc:picChg chg="mod">
-          <ac:chgData name="Vaughn Staples" userId="9a5933822faaa4bf" providerId="LiveId" clId="{BB914C8C-BCA1-484B-9A1F-EBF33ADB071F}" dt="2026-03-24T12:26:29.019" v="2" actId="1076"/>
+          <ac:chgData name="Vaughn Staples" userId="9a5933822faaa4bf" providerId="LiveId" clId="{BB914C8C-BCA1-484B-9A1F-EBF33ADB071F}" dt="2026-03-24T12:34:56.834" v="8" actId="1076"/>
           <ac:picMkLst>
             <pc:docMk/>
             <pc:sldMk cId="3126189164" sldId="258"/>
@@ -3534,7 +3534,7 @@
         </p:blipFill>
         <p:spPr>
           <a:xfrm>
-            <a:off x="2698242" y="-68580"/>
+            <a:off x="2708719" y="508635"/>
             <a:ext cx="10247376" cy="6858000"/>
           </a:xfrm>
           <a:prstGeom prst="rect">
